--- a/src/ppt/ssd/SSD固态硬盘.pptx
+++ b/src/ppt/ssd/SSD固态硬盘.pptx
@@ -5,16 +5,19 @@
     <p:sldMasterId id="2147483648" r:id="rId1"/>
   </p:sldMasterIdLst>
   <p:notesMasterIdLst>
-    <p:notesMasterId r:id="rId10"/>
+    <p:notesMasterId r:id="rId13"/>
   </p:notesMasterIdLst>
   <p:sldIdLst>
     <p:sldId id="256" r:id="rId3"/>
     <p:sldId id="259" r:id="rId4"/>
     <p:sldId id="260" r:id="rId5"/>
-    <p:sldId id="261" r:id="rId6"/>
-    <p:sldId id="262" r:id="rId7"/>
-    <p:sldId id="263" r:id="rId8"/>
-    <p:sldId id="264" r:id="rId9"/>
+    <p:sldId id="267" r:id="rId6"/>
+    <p:sldId id="264" r:id="rId7"/>
+    <p:sldId id="268" r:id="rId8"/>
+    <p:sldId id="261" r:id="rId9"/>
+    <p:sldId id="262" r:id="rId10"/>
+    <p:sldId id="263" r:id="rId11"/>
+    <p:sldId id="266" r:id="rId12"/>
   </p:sldIdLst>
   <p:sldSz cx="12192000" cy="6858000"/>
   <p:notesSz cx="7103745" cy="10234295"/>
@@ -1016,8 +1019,8 @@
           <a:lstStyle>
             <a:lvl1pPr>
               <a:defRPr sz="1000">
-                <a:latin typeface="微软雅黑" charset="-122"/>
-                <a:ea typeface="微软雅黑" charset="-122"/>
+                <a:latin typeface="微软雅黑" panose="020B0503020204020204" charset="-122"/>
+                <a:ea typeface="微软雅黑" panose="020B0503020204020204" charset="-122"/>
               </a:defRPr>
             </a:lvl1pPr>
           </a:lstStyle>
@@ -1057,8 +1060,8 @@
           <a:lstStyle>
             <a:lvl1pPr>
               <a:defRPr sz="1000">
-                <a:latin typeface="微软雅黑" charset="-122"/>
-                <a:ea typeface="微软雅黑" charset="-122"/>
+                <a:latin typeface="微软雅黑" panose="020B0503020204020204" charset="-122"/>
+                <a:ea typeface="微软雅黑" panose="020B0503020204020204" charset="-122"/>
               </a:defRPr>
             </a:lvl1pPr>
           </a:lstStyle>
@@ -1098,8 +1101,8 @@
           <a:lstStyle>
             <a:lvl1pPr>
               <a:defRPr sz="1000">
-                <a:latin typeface="微软雅黑" charset="-122"/>
-                <a:ea typeface="微软雅黑" charset="-122"/>
+                <a:latin typeface="微软雅黑" panose="020B0503020204020204" charset="-122"/>
+                <a:ea typeface="微软雅黑" panose="020B0503020204020204" charset="-122"/>
               </a:defRPr>
             </a:lvl1pPr>
           </a:lstStyle>
@@ -1139,8 +1142,8 @@
           <a:lstStyle>
             <a:lvl1pPr>
               <a:defRPr sz="1000">
-                <a:latin typeface="微软雅黑" charset="-122"/>
-                <a:ea typeface="微软雅黑" charset="-122"/>
+                <a:latin typeface="微软雅黑" panose="020B0503020204020204" charset="-122"/>
+                <a:ea typeface="微软雅黑" panose="020B0503020204020204" charset="-122"/>
               </a:defRPr>
             </a:lvl1pPr>
           </a:lstStyle>
@@ -1180,8 +1183,8 @@
           <a:lstStyle>
             <a:lvl1pPr>
               <a:defRPr sz="1000">
-                <a:latin typeface="微软雅黑" charset="-122"/>
-                <a:ea typeface="微软雅黑" charset="-122"/>
+                <a:latin typeface="微软雅黑" panose="020B0503020204020204" charset="-122"/>
+                <a:ea typeface="微软雅黑" panose="020B0503020204020204" charset="-122"/>
               </a:defRPr>
             </a:lvl1pPr>
           </a:lstStyle>
@@ -1221,8 +1224,8 @@
           <a:lstStyle>
             <a:lvl1pPr>
               <a:defRPr sz="1000">
-                <a:latin typeface="微软雅黑" charset="-122"/>
-                <a:ea typeface="微软雅黑" charset="-122"/>
+                <a:latin typeface="微软雅黑" panose="020B0503020204020204" charset="-122"/>
+                <a:ea typeface="微软雅黑" panose="020B0503020204020204" charset="-122"/>
               </a:defRPr>
             </a:lvl1pPr>
           </a:lstStyle>
@@ -1262,8 +1265,8 @@
           <a:lstStyle>
             <a:lvl1pPr>
               <a:defRPr sz="1000">
-                <a:latin typeface="微软雅黑" charset="-122"/>
-                <a:ea typeface="微软雅黑" charset="-122"/>
+                <a:latin typeface="微软雅黑" panose="020B0503020204020204" charset="-122"/>
+                <a:ea typeface="微软雅黑" panose="020B0503020204020204" charset="-122"/>
               </a:defRPr>
             </a:lvl1pPr>
           </a:lstStyle>
@@ -1303,8 +1306,8 @@
           <a:lstStyle>
             <a:lvl1pPr>
               <a:defRPr sz="1000">
-                <a:latin typeface="微软雅黑" charset="-122"/>
-                <a:ea typeface="微软雅黑" charset="-122"/>
+                <a:latin typeface="微软雅黑" panose="020B0503020204020204" charset="-122"/>
+                <a:ea typeface="微软雅黑" panose="020B0503020204020204" charset="-122"/>
               </a:defRPr>
             </a:lvl1pPr>
           </a:lstStyle>
@@ -2951,7 +2954,7 @@
         <a:spcBef>
           <a:spcPts val="1000"/>
         </a:spcBef>
-        <a:buFont typeface="Arial" panose="020B0604020202090204" pitchFamily="34" charset="0"/>
+        <a:buFont typeface="Arial" panose="020B0604020202020204" pitchFamily="34" charset="0"/>
         <a:buChar char="•"/>
         <a:defRPr sz="2800" kern="1200">
           <a:solidFill>
@@ -2969,7 +2972,7 @@
         <a:spcBef>
           <a:spcPts val="500"/>
         </a:spcBef>
-        <a:buFont typeface="Arial" panose="020B0604020202090204" pitchFamily="34" charset="0"/>
+        <a:buFont typeface="Arial" panose="020B0604020202020204" pitchFamily="34" charset="0"/>
         <a:buChar char="•"/>
         <a:defRPr sz="2400" kern="1200">
           <a:solidFill>
@@ -2987,7 +2990,7 @@
         <a:spcBef>
           <a:spcPts val="500"/>
         </a:spcBef>
-        <a:buFont typeface="Arial" panose="020B0604020202090204" pitchFamily="34" charset="0"/>
+        <a:buFont typeface="Arial" panose="020B0604020202020204" pitchFamily="34" charset="0"/>
         <a:buChar char="•"/>
         <a:defRPr sz="2000" kern="1200">
           <a:solidFill>
@@ -3005,7 +3008,7 @@
         <a:spcBef>
           <a:spcPts val="500"/>
         </a:spcBef>
-        <a:buFont typeface="Arial" panose="020B0604020202090204" pitchFamily="34" charset="0"/>
+        <a:buFont typeface="Arial" panose="020B0604020202020204" pitchFamily="34" charset="0"/>
         <a:buChar char="•"/>
         <a:defRPr sz="1800" kern="1200">
           <a:solidFill>
@@ -3023,7 +3026,7 @@
         <a:spcBef>
           <a:spcPts val="500"/>
         </a:spcBef>
-        <a:buFont typeface="Arial" panose="020B0604020202090204" pitchFamily="34" charset="0"/>
+        <a:buFont typeface="Arial" panose="020B0604020202020204" pitchFamily="34" charset="0"/>
         <a:buChar char="•"/>
         <a:defRPr sz="1800" kern="1200">
           <a:solidFill>
@@ -3041,7 +3044,7 @@
         <a:spcBef>
           <a:spcPts val="500"/>
         </a:spcBef>
-        <a:buFont typeface="Arial" panose="020B0604020202090204" pitchFamily="34" charset="0"/>
+        <a:buFont typeface="Arial" panose="020B0604020202020204" pitchFamily="34" charset="0"/>
         <a:buChar char="•"/>
         <a:defRPr sz="1800" kern="1200">
           <a:solidFill>
@@ -3059,7 +3062,7 @@
         <a:spcBef>
           <a:spcPts val="500"/>
         </a:spcBef>
-        <a:buFont typeface="Arial" panose="020B0604020202090204" pitchFamily="34" charset="0"/>
+        <a:buFont typeface="Arial" panose="020B0604020202020204" pitchFamily="34" charset="0"/>
         <a:buChar char="•"/>
         <a:defRPr sz="1800" kern="1200">
           <a:solidFill>
@@ -3077,7 +3080,7 @@
         <a:spcBef>
           <a:spcPts val="500"/>
         </a:spcBef>
-        <a:buFont typeface="Arial" panose="020B0604020202090204" pitchFamily="34" charset="0"/>
+        <a:buFont typeface="Arial" panose="020B0604020202020204" pitchFamily="34" charset="0"/>
         <a:buChar char="•"/>
         <a:defRPr sz="1800" kern="1200">
           <a:solidFill>
@@ -3095,7 +3098,7 @@
         <a:spcBef>
           <a:spcPts val="500"/>
         </a:spcBef>
-        <a:buFont typeface="Arial" panose="020B0604020202090204" pitchFamily="34" charset="0"/>
+        <a:buFont typeface="Arial" panose="020B0604020202020204" pitchFamily="34" charset="0"/>
         <a:buChar char="•"/>
         <a:defRPr sz="1800" kern="1200">
           <a:solidFill>
@@ -3268,6 +3271,251 @@
 </p:sld>
 </file>
 
+<file path=ppt/slides/slide10.xml><?xml version="1.0" encoding="utf-8"?>
+<p:sld xmlns:a="http://schemas.openxmlformats.org/drawingml/2006/main" xmlns:r="http://schemas.openxmlformats.org/officeDocument/2006/relationships" xmlns:p="http://schemas.openxmlformats.org/presentationml/2006/main">
+  <p:cSld>
+    <p:spTree>
+      <p:nvGrpSpPr>
+        <p:cNvPr id="1" name=""/>
+        <p:cNvGrpSpPr/>
+        <p:nvPr/>
+      </p:nvGrpSpPr>
+      <p:grpSpPr/>
+      <p:sp>
+        <p:nvSpPr>
+          <p:cNvPr id="2" name="文本框 1"/>
+          <p:cNvSpPr txBox="1"/>
+          <p:nvPr/>
+        </p:nvSpPr>
+        <p:spPr>
+          <a:xfrm>
+            <a:off x="1082040" y="390525"/>
+            <a:ext cx="8658225" cy="1476375"/>
+          </a:xfrm>
+          <a:prstGeom prst="rect">
+            <a:avLst/>
+          </a:prstGeom>
+          <a:noFill/>
+        </p:spPr>
+        <p:txBody>
+          <a:bodyPr wrap="square" rtlCol="0">
+            <a:spAutoFit/>
+          </a:bodyPr>
+          <a:p>
+            <a:r>
+              <a:rPr lang="zh-CN" altLang="en-US"/>
+              <a:t>推荐型号：</a:t>
+            </a:r>
+            <a:endParaRPr lang="zh-CN" altLang="en-US"/>
+          </a:p>
+          <a:p>
+            <a:r>
+              <a:rPr lang="zh-CN" altLang="en-US"/>
+              <a:t>西数蓝盘</a:t>
+            </a:r>
+            <a:r>
+              <a:rPr lang="en-US" altLang="zh-CN"/>
+              <a:t>SN550 </a:t>
+            </a:r>
+            <a:r>
+              <a:rPr lang="zh-CN" altLang="en-US"/>
+              <a:t>黑盘</a:t>
+            </a:r>
+            <a:r>
+              <a:rPr lang="en-US" altLang="zh-CN"/>
+              <a:t>SN750</a:t>
+            </a:r>
+            <a:endParaRPr lang="en-US" altLang="zh-CN"/>
+          </a:p>
+          <a:p>
+            <a:r>
+              <a:rPr lang="zh-CN" altLang="en-US"/>
+              <a:t>铠侠</a:t>
+            </a:r>
+            <a:r>
+              <a:rPr lang="en-US" altLang="zh-CN"/>
+              <a:t>RC10 RD10</a:t>
+            </a:r>
+            <a:endParaRPr lang="en-US" altLang="zh-CN"/>
+          </a:p>
+          <a:p>
+            <a:r>
+              <a:rPr lang="zh-CN" altLang="en-US"/>
+              <a:t>三星</a:t>
+            </a:r>
+            <a:r>
+              <a:rPr lang="en-US" altLang="zh-CN"/>
+              <a:t>EVO970 980</a:t>
+            </a:r>
+            <a:endParaRPr lang="en-US" altLang="zh-CN"/>
+          </a:p>
+          <a:p>
+            <a:r>
+              <a:rPr lang="zh-CN" altLang="en-US"/>
+              <a:t>光威（长江存储颗粒）、致钛（</a:t>
+            </a:r>
+            <a:r>
+              <a:rPr lang="zh-CN" altLang="en-US">
+                <a:sym typeface="+mn-ea"/>
+              </a:rPr>
+              <a:t>长江存储品牌）</a:t>
+            </a:r>
+            <a:endParaRPr lang="zh-CN" altLang="en-US"/>
+          </a:p>
+        </p:txBody>
+      </p:sp>
+      <p:pic>
+        <p:nvPicPr>
+          <p:cNvPr id="7" name="图片 6"/>
+          <p:cNvPicPr>
+            <a:picLocks noChangeAspect="1"/>
+          </p:cNvPicPr>
+          <p:nvPr/>
+        </p:nvPicPr>
+        <p:blipFill>
+          <a:blip r:embed="rId1"/>
+          <a:stretch>
+            <a:fillRect/>
+          </a:stretch>
+        </p:blipFill>
+        <p:spPr>
+          <a:xfrm>
+            <a:off x="407670" y="3428365"/>
+            <a:ext cx="1933575" cy="1247775"/>
+          </a:xfrm>
+          <a:prstGeom prst="rect">
+            <a:avLst/>
+          </a:prstGeom>
+        </p:spPr>
+      </p:pic>
+      <p:pic>
+        <p:nvPicPr>
+          <p:cNvPr id="3" name="图片 2"/>
+          <p:cNvPicPr>
+            <a:picLocks noChangeAspect="1"/>
+          </p:cNvPicPr>
+          <p:nvPr/>
+        </p:nvPicPr>
+        <p:blipFill>
+          <a:blip r:embed="rId2"/>
+          <a:stretch>
+            <a:fillRect/>
+          </a:stretch>
+        </p:blipFill>
+        <p:spPr>
+          <a:xfrm>
+            <a:off x="2554605" y="3739515"/>
+            <a:ext cx="1991995" cy="758825"/>
+          </a:xfrm>
+          <a:prstGeom prst="rect">
+            <a:avLst/>
+          </a:prstGeom>
+        </p:spPr>
+      </p:pic>
+      <p:pic>
+        <p:nvPicPr>
+          <p:cNvPr id="4" name="图片 3"/>
+          <p:cNvPicPr>
+            <a:picLocks noChangeAspect="1"/>
+          </p:cNvPicPr>
+          <p:nvPr/>
+        </p:nvPicPr>
+        <p:blipFill>
+          <a:blip r:embed="rId3"/>
+          <a:stretch>
+            <a:fillRect/>
+          </a:stretch>
+        </p:blipFill>
+        <p:spPr>
+          <a:xfrm>
+            <a:off x="4995545" y="3794760"/>
+            <a:ext cx="1900555" cy="724535"/>
+          </a:xfrm>
+          <a:prstGeom prst="rect">
+            <a:avLst/>
+          </a:prstGeom>
+        </p:spPr>
+      </p:pic>
+      <p:pic>
+        <p:nvPicPr>
+          <p:cNvPr id="5" name="图片 4"/>
+          <p:cNvPicPr>
+            <a:picLocks noChangeAspect="1"/>
+          </p:cNvPicPr>
+          <p:nvPr/>
+        </p:nvPicPr>
+        <p:blipFill>
+          <a:blip r:embed="rId4"/>
+          <a:stretch>
+            <a:fillRect/>
+          </a:stretch>
+        </p:blipFill>
+        <p:spPr>
+          <a:xfrm>
+            <a:off x="7166610" y="3611245"/>
+            <a:ext cx="1982470" cy="882015"/>
+          </a:xfrm>
+          <a:prstGeom prst="rect">
+            <a:avLst/>
+          </a:prstGeom>
+        </p:spPr>
+      </p:pic>
+      <p:pic>
+        <p:nvPicPr>
+          <p:cNvPr id="6" name="图片 5"/>
+          <p:cNvPicPr>
+            <a:picLocks noChangeAspect="1"/>
+          </p:cNvPicPr>
+          <p:nvPr/>
+        </p:nvPicPr>
+        <p:blipFill>
+          <a:blip r:embed="rId5"/>
+          <a:stretch>
+            <a:fillRect/>
+          </a:stretch>
+        </p:blipFill>
+        <p:spPr>
+          <a:xfrm>
+            <a:off x="9566910" y="3714115"/>
+            <a:ext cx="1879600" cy="885825"/>
+          </a:xfrm>
+          <a:prstGeom prst="rect">
+            <a:avLst/>
+          </a:prstGeom>
+        </p:spPr>
+      </p:pic>
+      <p:pic>
+        <p:nvPicPr>
+          <p:cNvPr id="8" name="图片 7"/>
+          <p:cNvPicPr>
+            <a:picLocks noChangeAspect="1"/>
+          </p:cNvPicPr>
+          <p:nvPr/>
+        </p:nvPicPr>
+        <p:blipFill>
+          <a:blip r:embed="rId6"/>
+          <a:stretch>
+            <a:fillRect/>
+          </a:stretch>
+        </p:blipFill>
+        <p:spPr>
+          <a:xfrm>
+            <a:off x="3716020" y="4676140"/>
+            <a:ext cx="4343400" cy="1543050"/>
+          </a:xfrm>
+          <a:prstGeom prst="rect">
+            <a:avLst/>
+          </a:prstGeom>
+        </p:spPr>
+      </p:pic>
+    </p:spTree>
+  </p:cSld>
+  <p:clrMapOvr>
+    <a:masterClrMapping/>
+  </p:clrMapOvr>
+</p:sld>
+</file>
+
 <file path=ppt/slides/slide2.xml><?xml version="1.0" encoding="utf-8"?>
 <p:sld xmlns:a="http://schemas.openxmlformats.org/drawingml/2006/main" xmlns:r="http://schemas.openxmlformats.org/officeDocument/2006/relationships" xmlns:p="http://schemas.openxmlformats.org/presentationml/2006/main">
   <p:cSld>
@@ -3353,7 +3601,7 @@
         </p:blipFill>
         <p:spPr>
           <a:xfrm>
-            <a:off x="1572260" y="3006090"/>
+            <a:off x="6463665" y="2934970"/>
             <a:ext cx="3286125" cy="2233930"/>
           </a:xfrm>
           <a:prstGeom prst="rect">
@@ -3377,7 +3625,7 @@
         </p:blipFill>
         <p:spPr>
           <a:xfrm>
-            <a:off x="6375400" y="2829560"/>
+            <a:off x="1614170" y="2758440"/>
             <a:ext cx="3042920" cy="2587625"/>
           </a:xfrm>
           <a:prstGeom prst="rect">
@@ -3411,7 +3659,7 @@
         </p:nvSpPr>
         <p:spPr>
           <a:xfrm>
-            <a:off x="622935" y="1210310"/>
+            <a:off x="699770" y="351790"/>
             <a:ext cx="10298430" cy="2030095"/>
           </a:xfrm>
           <a:prstGeom prst="rect">
@@ -3626,8 +3874,8 @@
         </p:blipFill>
         <p:spPr>
           <a:xfrm>
-            <a:off x="808990" y="3500120"/>
-            <a:ext cx="2357755" cy="2357755"/>
+            <a:off x="755650" y="2445385"/>
+            <a:ext cx="2103755" cy="2103755"/>
           </a:xfrm>
           <a:prstGeom prst="rect">
             <a:avLst/>
@@ -3650,7 +3898,7 @@
         </p:blipFill>
         <p:spPr>
           <a:xfrm>
-            <a:off x="3369945" y="4119245"/>
+            <a:off x="3399155" y="2698115"/>
             <a:ext cx="4124325" cy="1119505"/>
           </a:xfrm>
           <a:prstGeom prst="rect">
@@ -3674,7 +3922,7 @@
         </p:blipFill>
         <p:spPr>
           <a:xfrm>
-            <a:off x="7696835" y="3714115"/>
+            <a:off x="7703185" y="2293620"/>
             <a:ext cx="3429000" cy="1929130"/>
           </a:xfrm>
           <a:prstGeom prst="rect">
@@ -3702,14 +3950,14 @@
       <p:grpSpPr/>
       <p:sp>
         <p:nvSpPr>
-          <p:cNvPr id="4" name="文本框 3"/>
+          <p:cNvPr id="3" name="文本框 2"/>
           <p:cNvSpPr txBox="1"/>
           <p:nvPr/>
         </p:nvSpPr>
         <p:spPr>
           <a:xfrm>
-            <a:off x="164465" y="1932305"/>
-            <a:ext cx="5182870" cy="2614930"/>
+            <a:off x="930910" y="544830"/>
+            <a:ext cx="10284460" cy="1999615"/>
           </a:xfrm>
           <a:prstGeom prst="rect">
             <a:avLst/>
@@ -3722,55 +3970,61 @@
           </a:bodyPr>
           <a:p>
             <a:r>
-              <a:rPr lang="zh-CN" altLang="en-US" sz="3200"/>
-              <a:t>颗粒</a:t>
-            </a:r>
-            <a:endParaRPr lang="zh-CN" altLang="en-US" sz="3200"/>
-          </a:p>
-          <a:p>
-            <a:r>
-              <a:rPr lang="en-US" altLang="zh-CN" sz="3200"/>
-              <a:t>	</a:t>
-            </a:r>
-            <a:r>
-              <a:rPr lang="en-US" altLang="zh-CN" sz="2000"/>
-              <a:t>存储颗粒分为四种类型：</a:t>
-            </a:r>
-            <a:endParaRPr lang="en-US" altLang="zh-CN" sz="2000"/>
-          </a:p>
-          <a:p>
-            <a:r>
-              <a:rPr lang="en-US" altLang="zh-CN" sz="2000"/>
-              <a:t>S(single)LC颗粒：每个存储单元只存1bit数据</a:t>
-            </a:r>
-            <a:endParaRPr lang="en-US" altLang="zh-CN" sz="2000"/>
-          </a:p>
-          <a:p>
-            <a:r>
-              <a:rPr lang="en-US" altLang="zh-CN" sz="2000"/>
-              <a:t>M(multi)LC颗粒：每个存储单元存储2bit数据</a:t>
-            </a:r>
-            <a:endParaRPr lang="en-US" altLang="zh-CN" sz="2000"/>
-          </a:p>
-          <a:p>
-            <a:r>
-              <a:rPr lang="en-US" altLang="zh-CN" sz="2000"/>
-              <a:t>T(triple)LC颗粒：每个存储单元存储3bit数据</a:t>
-            </a:r>
-            <a:endParaRPr lang="en-US" altLang="zh-CN" sz="2000"/>
-          </a:p>
-          <a:p>
-            <a:r>
-              <a:rPr lang="en-US" altLang="zh-CN" sz="2000"/>
-              <a:t>Q(quad)LC颗粒：每个存储单元存储4bit数据</a:t>
-            </a:r>
-            <a:endParaRPr lang="en-US" altLang="zh-CN" sz="2000"/>
+              <a:rPr lang="zh-CN" altLang="en-US" sz="2800"/>
+              <a:t>性能指标</a:t>
+            </a:r>
+            <a:endParaRPr lang="zh-CN" altLang="en-US" sz="2800"/>
+          </a:p>
+          <a:p>
+            <a:r>
+              <a:rPr lang="zh-CN" altLang="en-US" sz="1600">
+                <a:solidFill>
+                  <a:srgbClr val="FF0000"/>
+                </a:solidFill>
+              </a:rPr>
+              <a:t>连续读写</a:t>
+            </a:r>
+            <a:r>
+              <a:rPr lang="zh-CN" altLang="en-US" sz="1600"/>
+              <a:t>：连续读写能力是衡量硬盘在进行较长文件长度（一般不少于128KB）顺序读写操作时所具备的性能，简而言之它类似于我们进行单个大容量文件拷贝时的性能。</a:t>
+            </a:r>
+            <a:endParaRPr lang="zh-CN" altLang="en-US" sz="1600"/>
+          </a:p>
+          <a:p>
+            <a:r>
+              <a:rPr lang="zh-CN" altLang="en-US" sz="1600">
+                <a:solidFill>
+                  <a:srgbClr val="FF0000"/>
+                </a:solidFill>
+              </a:rPr>
+              <a:t>随机读写</a:t>
+            </a:r>
+            <a:r>
+              <a:rPr lang="zh-CN" altLang="en-US" sz="1600"/>
+              <a:t>：随机读取速度的单位是IOPS，即每秒进行的IO操作次数，可认为是吞吐量指标。通俗地说，随机读写速度体现了SSD的小文件读写能力。</a:t>
+            </a:r>
+            <a:endParaRPr lang="zh-CN" altLang="en-US" sz="1600"/>
+          </a:p>
+          <a:p>
+            <a:r>
+              <a:rPr lang="zh-CN" altLang="en-US" sz="1600">
+                <a:solidFill>
+                  <a:srgbClr val="FF0000"/>
+                </a:solidFill>
+              </a:rPr>
+              <a:t>TBW和保修期</a:t>
+            </a:r>
+            <a:r>
+              <a:rPr lang="zh-CN" altLang="en-US" sz="1600"/>
+              <a:t>：Terabytes Written（TBW），一般译作“总计写入字节数”或“写入寿命”，指的是在SSD可能故障之前可以写入SSD的总数据量。</a:t>
+            </a:r>
+            <a:endParaRPr lang="zh-CN" altLang="en-US" sz="1600"/>
           </a:p>
         </p:txBody>
       </p:sp>
       <p:pic>
         <p:nvPicPr>
-          <p:cNvPr id="5" name="图片 4"/>
+          <p:cNvPr id="4" name="图片 3" descr="V1]$4AME80L%QL9]6D0WOBW"/>
           <p:cNvPicPr>
             <a:picLocks noChangeAspect="1"/>
           </p:cNvPicPr>
@@ -3784,8 +4038,56 @@
         </p:blipFill>
         <p:spPr>
           <a:xfrm>
-            <a:off x="5714365" y="1042035"/>
-            <a:ext cx="5904230" cy="4395470"/>
+            <a:off x="1139825" y="2825115"/>
+            <a:ext cx="2381250" cy="2206625"/>
+          </a:xfrm>
+          <a:prstGeom prst="rect">
+            <a:avLst/>
+          </a:prstGeom>
+        </p:spPr>
+      </p:pic>
+      <p:pic>
+        <p:nvPicPr>
+          <p:cNvPr id="5" name="图片 4" descr="ECHNS2%ZYY4~[F[ZN`MX{X6"/>
+          <p:cNvPicPr>
+            <a:picLocks noChangeAspect="1"/>
+          </p:cNvPicPr>
+          <p:nvPr/>
+        </p:nvPicPr>
+        <p:blipFill>
+          <a:blip r:embed="rId2"/>
+          <a:stretch>
+            <a:fillRect/>
+          </a:stretch>
+        </p:blipFill>
+        <p:spPr>
+          <a:xfrm>
+            <a:off x="4459605" y="2860675"/>
+            <a:ext cx="2303780" cy="2134870"/>
+          </a:xfrm>
+          <a:prstGeom prst="rect">
+            <a:avLst/>
+          </a:prstGeom>
+        </p:spPr>
+      </p:pic>
+      <p:pic>
+        <p:nvPicPr>
+          <p:cNvPr id="6" name="图片 5" descr="CC1X]K~9Q%22AY}H~$E1U%S"/>
+          <p:cNvPicPr>
+            <a:picLocks noChangeAspect="1"/>
+          </p:cNvPicPr>
+          <p:nvPr/>
+        </p:nvPicPr>
+        <p:blipFill>
+          <a:blip r:embed="rId3"/>
+          <a:stretch>
+            <a:fillRect/>
+          </a:stretch>
+        </p:blipFill>
+        <p:spPr>
+          <a:xfrm>
+            <a:off x="7785735" y="2752725"/>
+            <a:ext cx="2538730" cy="2352040"/>
           </a:xfrm>
           <a:prstGeom prst="rect">
             <a:avLst/>
@@ -3812,14 +4114,14 @@
       <p:grpSpPr/>
       <p:sp>
         <p:nvSpPr>
-          <p:cNvPr id="6" name="文本框 5"/>
+          <p:cNvPr id="4" name="文本框 3"/>
           <p:cNvSpPr txBox="1"/>
           <p:nvPr/>
         </p:nvSpPr>
         <p:spPr>
           <a:xfrm>
-            <a:off x="1562735" y="1058545"/>
-            <a:ext cx="2681605" cy="2584450"/>
+            <a:off x="871220" y="1486535"/>
+            <a:ext cx="9526905" cy="1753235"/>
           </a:xfrm>
           <a:prstGeom prst="rect">
             <a:avLst/>
@@ -3832,137 +4134,30 @@
           </a:bodyPr>
           <a:p>
             <a:r>
-              <a:rPr lang="zh-CN" altLang="en-US">
-                <a:sym typeface="+mn-ea"/>
-              </a:rPr>
-              <a:t>能自主生产颗粒厂商：</a:t>
-            </a:r>
-            <a:endParaRPr lang="zh-CN" altLang="en-US">
-              <a:sym typeface="+mn-ea"/>
-            </a:endParaRPr>
-          </a:p>
-          <a:p>
-            <a:r>
-              <a:rPr lang="zh-CN" altLang="en-US">
-                <a:sym typeface="+mn-ea"/>
-              </a:rPr>
-              <a:t>intel</a:t>
-            </a:r>
-            <a:endParaRPr lang="zh-CN" altLang="en-US"/>
-          </a:p>
-          <a:p>
-            <a:r>
-              <a:rPr lang="zh-CN" altLang="en-US">
-                <a:sym typeface="+mn-ea"/>
-              </a:rPr>
-              <a:t>三星</a:t>
-            </a:r>
-            <a:endParaRPr lang="zh-CN" altLang="en-US"/>
-          </a:p>
-          <a:p>
-            <a:r>
-              <a:rPr lang="zh-CN" altLang="en-US">
-                <a:sym typeface="+mn-ea"/>
-              </a:rPr>
-              <a:t>镁光（英睿达）</a:t>
-            </a:r>
-            <a:endParaRPr lang="zh-CN" altLang="en-US"/>
-          </a:p>
-          <a:p>
-            <a:r>
-              <a:rPr lang="zh-CN" altLang="en-US">
-                <a:sym typeface="+mn-ea"/>
-              </a:rPr>
-              <a:t>海力士</a:t>
-            </a:r>
-            <a:endParaRPr lang="zh-CN" altLang="en-US"/>
-          </a:p>
-          <a:p>
-            <a:r>
-              <a:rPr lang="zh-CN" altLang="en-US">
-                <a:sym typeface="+mn-ea"/>
-              </a:rPr>
-              <a:t>东芝</a:t>
-            </a:r>
-            <a:endParaRPr lang="zh-CN" altLang="en-US"/>
-          </a:p>
-          <a:p>
-            <a:r>
-              <a:rPr lang="zh-CN" altLang="en-US">
-                <a:sym typeface="+mn-ea"/>
-              </a:rPr>
-              <a:t>闪迪（西部数据）</a:t>
-            </a:r>
-            <a:endParaRPr lang="zh-CN" altLang="en-US"/>
-          </a:p>
-          <a:p>
-            <a:r>
-              <a:rPr lang="zh-CN" altLang="en-US">
-                <a:sym typeface="+mn-ea"/>
-              </a:rPr>
-              <a:t>长江存储（2020）</a:t>
-            </a:r>
-            <a:endParaRPr lang="zh-CN" altLang="en-US"/>
-          </a:p>
-          <a:p>
-            <a:endParaRPr lang="zh-CN" altLang="en-US"/>
-          </a:p>
-        </p:txBody>
-      </p:sp>
-      <p:sp>
-        <p:nvSpPr>
-          <p:cNvPr id="7" name="文本框 6"/>
-          <p:cNvSpPr txBox="1"/>
-          <p:nvPr/>
-        </p:nvSpPr>
-        <p:spPr>
-          <a:xfrm>
-            <a:off x="6116320" y="1058545"/>
-            <a:ext cx="2681605" cy="2030095"/>
-          </a:xfrm>
-          <a:prstGeom prst="rect">
-            <a:avLst/>
-          </a:prstGeom>
-          <a:noFill/>
-        </p:spPr>
-        <p:txBody>
-          <a:bodyPr wrap="square" rtlCol="0">
-            <a:spAutoFit/>
-          </a:bodyPr>
-          <a:p>
-            <a:r>
-              <a:rPr lang="zh-CN" altLang="en-US">
-                <a:sym typeface="+mn-ea"/>
-              </a:rPr>
-              <a:t>不能自主生产内存颗粒的厂商，但是用的是以上厂商生产合格颗粒的品牌有：</a:t>
-            </a:r>
-            <a:endParaRPr lang="zh-CN" altLang="en-US">
-              <a:sym typeface="+mn-ea"/>
-            </a:endParaRPr>
-          </a:p>
-          <a:p>
-            <a:r>
-              <a:rPr lang="zh-CN" altLang="en-US">
-                <a:sym typeface="+mn-ea"/>
-              </a:rPr>
-              <a:t>建兴</a:t>
-            </a:r>
-            <a:endParaRPr lang="zh-CN" altLang="en-US">
-              <a:sym typeface="+mn-ea"/>
-            </a:endParaRPr>
-          </a:p>
-          <a:p>
-            <a:r>
-              <a:rPr lang="zh-CN" altLang="en-US">
-                <a:sym typeface="+mn-ea"/>
-              </a:rPr>
-              <a:t>浦科特</a:t>
-            </a:r>
-            <a:endParaRPr lang="zh-CN" altLang="en-US">
-              <a:sym typeface="+mn-ea"/>
-            </a:endParaRPr>
-          </a:p>
-          <a:p>
+              <a:rPr lang="zh-CN" altLang="en-US" sz="3600"/>
+              <a:t>缓存</a:t>
+            </a:r>
+            <a:endParaRPr lang="zh-CN" altLang="en-US"/>
+          </a:p>
+          <a:p>
+            <a:r>
+              <a:rPr lang="zh-CN" altLang="en-US"/>
+              <a:t>缓存有两种：</a:t>
+            </a:r>
+            <a:endParaRPr lang="zh-CN" altLang="en-US"/>
+          </a:p>
+          <a:p>
+            <a:r>
+              <a:rPr lang="zh-CN" altLang="en-US"/>
+              <a:t>DDR：速度很快，跟内存条差不多</a:t>
+            </a:r>
+            <a:endParaRPr lang="zh-CN" altLang="en-US"/>
+          </a:p>
+          <a:p>
+            <a:r>
+              <a:rPr lang="zh-CN" altLang="en-US"/>
+              <a:t>slc-cache：SLC缓存，因为大多数是TLC的硬盘，所以优先使用SLC缓存，模拟SLC颗粒进行工作。所以在传输大文件的时候，会有明显的掉速现象。</a:t>
+            </a:r>
             <a:endParaRPr lang="zh-CN" altLang="en-US"/>
           </a:p>
         </p:txBody>
@@ -3985,74 +4180,78 @@
         <p:nvPr/>
       </p:nvGrpSpPr>
       <p:grpSpPr/>
-      <p:sp>
-        <p:nvSpPr>
-          <p:cNvPr id="4" name="文本框 3"/>
-          <p:cNvSpPr txBox="1"/>
+      <p:pic>
+        <p:nvPicPr>
+          <p:cNvPr id="2" name="图片 1" descr="1609812128(1)"/>
+          <p:cNvPicPr>
+            <a:picLocks noChangeAspect="1"/>
+          </p:cNvPicPr>
           <p:nvPr/>
-        </p:nvSpPr>
-        <p:spPr>
-          <a:xfrm>
-            <a:off x="986790" y="943610"/>
-            <a:ext cx="10085070" cy="2306955"/>
-          </a:xfrm>
-          <a:prstGeom prst="rect">
-            <a:avLst/>
-          </a:prstGeom>
-          <a:noFill/>
-        </p:spPr>
-        <p:txBody>
-          <a:bodyPr wrap="square" rtlCol="0">
-            <a:spAutoFit/>
-          </a:bodyPr>
-          <a:p>
-            <a:r>
-              <a:rPr lang="zh-CN" altLang="en-US" sz="3600"/>
-              <a:t>主控</a:t>
-            </a:r>
-            <a:endParaRPr lang="zh-CN" altLang="en-US"/>
-          </a:p>
-          <a:p>
-            <a:r>
-              <a:rPr lang="en-US" altLang="zh-CN"/>
-              <a:t>	</a:t>
-            </a:r>
-            <a:r>
-              <a:rPr lang="zh-CN" altLang="en-US"/>
-              <a:t>主控负责硬盘所有数据的管理，相当于仓库的管理员，负责将对应的数据（货物）编号并放到合适的存储颗粒（货架）上。</a:t>
-            </a:r>
-            <a:endParaRPr lang="zh-CN" altLang="en-US"/>
-          </a:p>
-          <a:p>
-            <a:r>
-              <a:rPr lang="zh-CN" altLang="en-US"/>
-              <a:t>马牌</a:t>
-            </a:r>
-            <a:endParaRPr lang="zh-CN" altLang="en-US"/>
-          </a:p>
-          <a:p>
-            <a:r>
-              <a:rPr lang="zh-CN" altLang="en-US"/>
-              <a:t>三星</a:t>
-            </a:r>
-            <a:endParaRPr lang="zh-CN" altLang="en-US"/>
-          </a:p>
-          <a:p>
-            <a:r>
-              <a:rPr lang="zh-CN" altLang="en-US"/>
-              <a:t>英特尔</a:t>
-            </a:r>
-            <a:endParaRPr lang="zh-CN" altLang="en-US"/>
-          </a:p>
-          <a:p>
-            <a:r>
-              <a:rPr lang="zh-CN" altLang="en-US"/>
-              <a:t>还有做的不错的有东芝、慧荣、群联、闪迪（分型号）</a:t>
-            </a:r>
-            <a:endParaRPr lang="zh-CN" altLang="en-US"/>
-          </a:p>
-        </p:txBody>
-      </p:sp>
+        </p:nvPicPr>
+        <p:blipFill>
+          <a:blip r:embed="rId1"/>
+          <a:stretch>
+            <a:fillRect/>
+          </a:stretch>
+        </p:blipFill>
+        <p:spPr>
+          <a:xfrm>
+            <a:off x="304800" y="1673860"/>
+            <a:ext cx="3345180" cy="2839720"/>
+          </a:xfrm>
+          <a:prstGeom prst="rect">
+            <a:avLst/>
+          </a:prstGeom>
+        </p:spPr>
+      </p:pic>
+      <p:pic>
+        <p:nvPicPr>
+          <p:cNvPr id="3" name="图片 2" descr="W)E3@KQ9$2VK}DPEEOX57(4"/>
+          <p:cNvPicPr>
+            <a:picLocks noChangeAspect="1"/>
+          </p:cNvPicPr>
+          <p:nvPr/>
+        </p:nvPicPr>
+        <p:blipFill>
+          <a:blip r:embed="rId2"/>
+          <a:stretch>
+            <a:fillRect/>
+          </a:stretch>
+        </p:blipFill>
+        <p:spPr>
+          <a:xfrm>
+            <a:off x="4324985" y="1673860"/>
+            <a:ext cx="3542665" cy="3006725"/>
+          </a:xfrm>
+          <a:prstGeom prst="rect">
+            <a:avLst/>
+          </a:prstGeom>
+        </p:spPr>
+      </p:pic>
+      <p:pic>
+        <p:nvPicPr>
+          <p:cNvPr id="4" name="图片 3" descr="XL3V8OD)%S41DYVK@C0S1{1"/>
+          <p:cNvPicPr>
+            <a:picLocks noChangeAspect="1"/>
+          </p:cNvPicPr>
+          <p:nvPr/>
+        </p:nvPicPr>
+        <p:blipFill>
+          <a:blip r:embed="rId3"/>
+          <a:stretch>
+            <a:fillRect/>
+          </a:stretch>
+        </p:blipFill>
+        <p:spPr>
+          <a:xfrm>
+            <a:off x="8237855" y="1755775"/>
+            <a:ext cx="3348355" cy="2842260"/>
+          </a:xfrm>
+          <a:prstGeom prst="rect">
+            <a:avLst/>
+          </a:prstGeom>
+        </p:spPr>
+      </p:pic>
     </p:spTree>
   </p:cSld>
   <p:clrMapOvr>
@@ -4079,8 +4278,8 @@
         </p:nvSpPr>
         <p:spPr>
           <a:xfrm>
-            <a:off x="871220" y="1486535"/>
-            <a:ext cx="9526905" cy="1753235"/>
+            <a:off x="164465" y="1932305"/>
+            <a:ext cx="5182870" cy="2614930"/>
           </a:xfrm>
           <a:prstGeom prst="rect">
             <a:avLst/>
@@ -4093,40 +4292,700 @@
           </a:bodyPr>
           <a:p>
             <a:r>
-              <a:rPr lang="zh-CN" altLang="en-US" sz="3600"/>
-              <a:t>缓存</a:t>
-            </a:r>
-            <a:endParaRPr lang="zh-CN" altLang="en-US"/>
-          </a:p>
-          <a:p>
-            <a:r>
-              <a:rPr lang="zh-CN" altLang="en-US"/>
-              <a:t>缓存有两种：</a:t>
-            </a:r>
-            <a:endParaRPr lang="zh-CN" altLang="en-US"/>
-          </a:p>
-          <a:p>
-            <a:r>
-              <a:rPr lang="zh-CN" altLang="en-US"/>
-              <a:t>DDR：速度很快，跟内存条差不多</a:t>
-            </a:r>
-            <a:endParaRPr lang="zh-CN" altLang="en-US"/>
-          </a:p>
-          <a:p>
-            <a:r>
-              <a:rPr lang="zh-CN" altLang="en-US"/>
-              <a:t>slc-cache：SLC缓存，因为大多数是TLC的硬盘，所以优先使用SLC缓存，模拟SLC颗粒进行工作。所以在传输大文件的时候，会有明显的掉速现象。</a:t>
-            </a:r>
-            <a:endParaRPr lang="zh-CN" altLang="en-US"/>
-          </a:p>
-        </p:txBody>
-      </p:sp>
+              <a:rPr lang="zh-CN" altLang="en-US" sz="3200"/>
+              <a:t>颗粒</a:t>
+            </a:r>
+            <a:endParaRPr lang="zh-CN" altLang="en-US" sz="3200"/>
+          </a:p>
+          <a:p>
+            <a:r>
+              <a:rPr lang="en-US" altLang="zh-CN" sz="3200"/>
+              <a:t>	</a:t>
+            </a:r>
+            <a:r>
+              <a:rPr lang="en-US" altLang="zh-CN" sz="2000"/>
+              <a:t>存储颗粒分为四种类型：</a:t>
+            </a:r>
+            <a:endParaRPr lang="en-US" altLang="zh-CN" sz="2000"/>
+          </a:p>
+          <a:p>
+            <a:r>
+              <a:rPr lang="en-US" altLang="zh-CN" sz="2000"/>
+              <a:t>S(single)LC颗粒：每个存储单元只存1bit数据</a:t>
+            </a:r>
+            <a:endParaRPr lang="en-US" altLang="zh-CN" sz="2000"/>
+          </a:p>
+          <a:p>
+            <a:r>
+              <a:rPr lang="en-US" altLang="zh-CN" sz="2000"/>
+              <a:t>M(multi)LC颗粒：每个存储单元存储2bit数据</a:t>
+            </a:r>
+            <a:endParaRPr lang="en-US" altLang="zh-CN" sz="2000"/>
+          </a:p>
+          <a:p>
+            <a:r>
+              <a:rPr lang="en-US" altLang="zh-CN" sz="2000"/>
+              <a:t>T(triple)LC颗粒：每个存储单元存储3bit数据</a:t>
+            </a:r>
+            <a:endParaRPr lang="en-US" altLang="zh-CN" sz="2000"/>
+          </a:p>
+          <a:p>
+            <a:r>
+              <a:rPr lang="en-US" altLang="zh-CN" sz="2000"/>
+              <a:t>Q(quad)LC颗粒：每个存储单元存储4bit数据</a:t>
+            </a:r>
+            <a:endParaRPr lang="en-US" altLang="zh-CN" sz="2000"/>
+          </a:p>
+        </p:txBody>
+      </p:sp>
+      <p:pic>
+        <p:nvPicPr>
+          <p:cNvPr id="5" name="图片 4"/>
+          <p:cNvPicPr>
+            <a:picLocks noChangeAspect="1"/>
+          </p:cNvPicPr>
+          <p:nvPr/>
+        </p:nvPicPr>
+        <p:blipFill>
+          <a:blip r:embed="rId1"/>
+          <a:stretch>
+            <a:fillRect/>
+          </a:stretch>
+        </p:blipFill>
+        <p:spPr>
+          <a:xfrm>
+            <a:off x="5714365" y="1042035"/>
+            <a:ext cx="5904230" cy="4395470"/>
+          </a:xfrm>
+          <a:prstGeom prst="rect">
+            <a:avLst/>
+          </a:prstGeom>
+        </p:spPr>
+      </p:pic>
     </p:spTree>
   </p:cSld>
   <p:clrMapOvr>
     <a:masterClrMapping/>
   </p:clrMapOvr>
 </p:sld>
+</file>
+
+<file path=ppt/slides/slide8.xml><?xml version="1.0" encoding="utf-8"?>
+<p:sld xmlns:a="http://schemas.openxmlformats.org/drawingml/2006/main" xmlns:r="http://schemas.openxmlformats.org/officeDocument/2006/relationships" xmlns:p="http://schemas.openxmlformats.org/presentationml/2006/main">
+  <p:cSld>
+    <p:spTree>
+      <p:nvGrpSpPr>
+        <p:cNvPr id="1" name=""/>
+        <p:cNvGrpSpPr/>
+        <p:nvPr/>
+      </p:nvGrpSpPr>
+      <p:grpSpPr/>
+      <p:sp>
+        <p:nvSpPr>
+          <p:cNvPr id="6" name="文本框 5"/>
+          <p:cNvSpPr txBox="1"/>
+          <p:nvPr/>
+        </p:nvSpPr>
+        <p:spPr>
+          <a:xfrm>
+            <a:off x="1562735" y="1058545"/>
+            <a:ext cx="2681605" cy="2584450"/>
+          </a:xfrm>
+          <a:prstGeom prst="rect">
+            <a:avLst/>
+          </a:prstGeom>
+          <a:noFill/>
+        </p:spPr>
+        <p:txBody>
+          <a:bodyPr wrap="square" rtlCol="0">
+            <a:spAutoFit/>
+          </a:bodyPr>
+          <a:p>
+            <a:r>
+              <a:rPr lang="zh-CN" altLang="en-US">
+                <a:sym typeface="+mn-ea"/>
+              </a:rPr>
+              <a:t>能自主生产颗粒厂商：</a:t>
+            </a:r>
+            <a:endParaRPr lang="zh-CN" altLang="en-US">
+              <a:sym typeface="+mn-ea"/>
+            </a:endParaRPr>
+          </a:p>
+          <a:p>
+            <a:r>
+              <a:rPr lang="zh-CN" altLang="en-US">
+                <a:sym typeface="+mn-ea"/>
+              </a:rPr>
+              <a:t>intel</a:t>
+            </a:r>
+            <a:endParaRPr lang="zh-CN" altLang="en-US"/>
+          </a:p>
+          <a:p>
+            <a:r>
+              <a:rPr lang="zh-CN" altLang="en-US">
+                <a:sym typeface="+mn-ea"/>
+              </a:rPr>
+              <a:t>三星</a:t>
+            </a:r>
+            <a:endParaRPr lang="zh-CN" altLang="en-US"/>
+          </a:p>
+          <a:p>
+            <a:r>
+              <a:rPr lang="zh-CN" altLang="en-US">
+                <a:sym typeface="+mn-ea"/>
+              </a:rPr>
+              <a:t>镁光（英睿达）</a:t>
+            </a:r>
+            <a:endParaRPr lang="zh-CN" altLang="en-US"/>
+          </a:p>
+          <a:p>
+            <a:r>
+              <a:rPr lang="zh-CN" altLang="en-US">
+                <a:sym typeface="+mn-ea"/>
+              </a:rPr>
+              <a:t>海力士</a:t>
+            </a:r>
+            <a:endParaRPr lang="zh-CN" altLang="en-US"/>
+          </a:p>
+          <a:p>
+            <a:r>
+              <a:rPr lang="zh-CN" altLang="en-US">
+                <a:sym typeface="+mn-ea"/>
+              </a:rPr>
+              <a:t>东芝（铠侠）</a:t>
+            </a:r>
+            <a:endParaRPr lang="zh-CN" altLang="en-US"/>
+          </a:p>
+          <a:p>
+            <a:r>
+              <a:rPr lang="zh-CN" altLang="en-US">
+                <a:sym typeface="+mn-ea"/>
+              </a:rPr>
+              <a:t>闪迪（西部数据）</a:t>
+            </a:r>
+            <a:endParaRPr lang="zh-CN" altLang="en-US"/>
+          </a:p>
+          <a:p>
+            <a:r>
+              <a:rPr lang="zh-CN" altLang="en-US">
+                <a:sym typeface="+mn-ea"/>
+              </a:rPr>
+              <a:t>长江存储（致钛）</a:t>
+            </a:r>
+            <a:endParaRPr lang="zh-CN" altLang="en-US"/>
+          </a:p>
+          <a:p>
+            <a:endParaRPr lang="zh-CN" altLang="en-US"/>
+          </a:p>
+        </p:txBody>
+      </p:sp>
+      <p:sp>
+        <p:nvSpPr>
+          <p:cNvPr id="7" name="文本框 6"/>
+          <p:cNvSpPr txBox="1"/>
+          <p:nvPr/>
+        </p:nvSpPr>
+        <p:spPr>
+          <a:xfrm>
+            <a:off x="6116320" y="1058545"/>
+            <a:ext cx="2681605" cy="2306955"/>
+          </a:xfrm>
+          <a:prstGeom prst="rect">
+            <a:avLst/>
+          </a:prstGeom>
+          <a:noFill/>
+        </p:spPr>
+        <p:txBody>
+          <a:bodyPr wrap="square" rtlCol="0">
+            <a:spAutoFit/>
+          </a:bodyPr>
+          <a:p>
+            <a:r>
+              <a:rPr lang="zh-CN" altLang="en-US">
+                <a:sym typeface="+mn-ea"/>
+              </a:rPr>
+              <a:t>不能自主生产内存颗粒的厂商，但是用的是以上厂商生产合格颗粒的品牌有：</a:t>
+            </a:r>
+            <a:endParaRPr lang="zh-CN" altLang="en-US">
+              <a:sym typeface="+mn-ea"/>
+            </a:endParaRPr>
+          </a:p>
+          <a:p>
+            <a:r>
+              <a:rPr lang="zh-CN" altLang="en-US">
+                <a:sym typeface="+mn-ea"/>
+              </a:rPr>
+              <a:t>建兴</a:t>
+            </a:r>
+            <a:endParaRPr lang="zh-CN" altLang="en-US">
+              <a:sym typeface="+mn-ea"/>
+            </a:endParaRPr>
+          </a:p>
+          <a:p>
+            <a:r>
+              <a:rPr lang="zh-CN" altLang="en-US">
+                <a:sym typeface="+mn-ea"/>
+              </a:rPr>
+              <a:t>浦科特</a:t>
+            </a:r>
+            <a:endParaRPr lang="zh-CN" altLang="en-US">
+              <a:sym typeface="+mn-ea"/>
+            </a:endParaRPr>
+          </a:p>
+          <a:p>
+            <a:r>
+              <a:rPr lang="zh-CN" altLang="en-US">
+                <a:sym typeface="+mn-ea"/>
+              </a:rPr>
+              <a:t>光威（长江存储）</a:t>
+            </a:r>
+            <a:endParaRPr lang="zh-CN" altLang="en-US">
+              <a:sym typeface="+mn-ea"/>
+            </a:endParaRPr>
+          </a:p>
+          <a:p>
+            <a:endParaRPr lang="zh-CN" altLang="en-US"/>
+          </a:p>
+        </p:txBody>
+      </p:sp>
+      <p:pic>
+        <p:nvPicPr>
+          <p:cNvPr id="2" name="图片 1"/>
+          <p:cNvPicPr>
+            <a:picLocks noChangeAspect="1"/>
+          </p:cNvPicPr>
+          <p:nvPr/>
+        </p:nvPicPr>
+        <p:blipFill>
+          <a:blip r:embed="rId1"/>
+          <a:stretch>
+            <a:fillRect/>
+          </a:stretch>
+        </p:blipFill>
+        <p:spPr>
+          <a:xfrm>
+            <a:off x="834390" y="3977640"/>
+            <a:ext cx="809625" cy="809625"/>
+          </a:xfrm>
+          <a:prstGeom prst="rect">
+            <a:avLst/>
+          </a:prstGeom>
+        </p:spPr>
+      </p:pic>
+      <p:pic>
+        <p:nvPicPr>
+          <p:cNvPr id="3" name="图片 2"/>
+          <p:cNvPicPr>
+            <a:picLocks noChangeAspect="1"/>
+          </p:cNvPicPr>
+          <p:nvPr/>
+        </p:nvPicPr>
+        <p:blipFill>
+          <a:blip r:embed="rId2"/>
+          <a:stretch>
+            <a:fillRect/>
+          </a:stretch>
+        </p:blipFill>
+        <p:spPr>
+          <a:xfrm>
+            <a:off x="1949450" y="3834765"/>
+            <a:ext cx="1162050" cy="1095375"/>
+          </a:xfrm>
+          <a:prstGeom prst="rect">
+            <a:avLst/>
+          </a:prstGeom>
+        </p:spPr>
+      </p:pic>
+      <p:pic>
+        <p:nvPicPr>
+          <p:cNvPr id="4" name="图片 3"/>
+          <p:cNvPicPr>
+            <a:picLocks noChangeAspect="1"/>
+          </p:cNvPicPr>
+          <p:nvPr/>
+        </p:nvPicPr>
+        <p:blipFill>
+          <a:blip r:embed="rId3"/>
+          <a:stretch>
+            <a:fillRect/>
+          </a:stretch>
+        </p:blipFill>
+        <p:spPr>
+          <a:xfrm>
+            <a:off x="3531870" y="4048760"/>
+            <a:ext cx="781050" cy="666750"/>
+          </a:xfrm>
+          <a:prstGeom prst="rect">
+            <a:avLst/>
+          </a:prstGeom>
+        </p:spPr>
+      </p:pic>
+      <p:pic>
+        <p:nvPicPr>
+          <p:cNvPr id="5" name="图片 4"/>
+          <p:cNvPicPr>
+            <a:picLocks noChangeAspect="1"/>
+          </p:cNvPicPr>
+          <p:nvPr/>
+        </p:nvPicPr>
+        <p:blipFill>
+          <a:blip r:embed="rId4"/>
+          <a:stretch>
+            <a:fillRect/>
+          </a:stretch>
+        </p:blipFill>
+        <p:spPr>
+          <a:xfrm>
+            <a:off x="6577965" y="5594985"/>
+            <a:ext cx="771525" cy="666750"/>
+          </a:xfrm>
+          <a:prstGeom prst="rect">
+            <a:avLst/>
+          </a:prstGeom>
+        </p:spPr>
+      </p:pic>
+      <p:pic>
+        <p:nvPicPr>
+          <p:cNvPr id="8" name="图片 7"/>
+          <p:cNvPicPr>
+            <a:picLocks noChangeAspect="1"/>
+          </p:cNvPicPr>
+          <p:nvPr/>
+        </p:nvPicPr>
+        <p:blipFill>
+          <a:blip r:embed="rId5"/>
+          <a:stretch>
+            <a:fillRect/>
+          </a:stretch>
+        </p:blipFill>
+        <p:spPr>
+          <a:xfrm>
+            <a:off x="4357370" y="3839845"/>
+            <a:ext cx="1238250" cy="1085850"/>
+          </a:xfrm>
+          <a:prstGeom prst="rect">
+            <a:avLst/>
+          </a:prstGeom>
+        </p:spPr>
+      </p:pic>
+      <p:pic>
+        <p:nvPicPr>
+          <p:cNvPr id="9" name="图片 8"/>
+          <p:cNvPicPr>
+            <a:picLocks noChangeAspect="1"/>
+          </p:cNvPicPr>
+          <p:nvPr/>
+        </p:nvPicPr>
+        <p:blipFill>
+          <a:blip r:embed="rId6"/>
+          <a:stretch>
+            <a:fillRect/>
+          </a:stretch>
+        </p:blipFill>
+        <p:spPr>
+          <a:xfrm>
+            <a:off x="5827395" y="3830320"/>
+            <a:ext cx="1152525" cy="1095375"/>
+          </a:xfrm>
+          <a:prstGeom prst="rect">
+            <a:avLst/>
+          </a:prstGeom>
+        </p:spPr>
+      </p:pic>
+      <p:pic>
+        <p:nvPicPr>
+          <p:cNvPr id="10" name="图片 9"/>
+          <p:cNvPicPr>
+            <a:picLocks noChangeAspect="1"/>
+          </p:cNvPicPr>
+          <p:nvPr/>
+        </p:nvPicPr>
+        <p:blipFill>
+          <a:blip r:embed="rId7"/>
+          <a:stretch>
+            <a:fillRect/>
+          </a:stretch>
+        </p:blipFill>
+        <p:spPr>
+          <a:xfrm>
+            <a:off x="7349490" y="3830320"/>
+            <a:ext cx="1200150" cy="1047750"/>
+          </a:xfrm>
+          <a:prstGeom prst="rect">
+            <a:avLst/>
+          </a:prstGeom>
+        </p:spPr>
+      </p:pic>
+      <p:pic>
+        <p:nvPicPr>
+          <p:cNvPr id="11" name="图片 10"/>
+          <p:cNvPicPr>
+            <a:picLocks noChangeAspect="1"/>
+          </p:cNvPicPr>
+          <p:nvPr/>
+        </p:nvPicPr>
+        <p:blipFill>
+          <a:blip r:embed="rId8"/>
+          <a:stretch>
+            <a:fillRect/>
+          </a:stretch>
+        </p:blipFill>
+        <p:spPr>
+          <a:xfrm>
+            <a:off x="8951595" y="3749040"/>
+            <a:ext cx="1133475" cy="1038225"/>
+          </a:xfrm>
+          <a:prstGeom prst="rect">
+            <a:avLst/>
+          </a:prstGeom>
+        </p:spPr>
+      </p:pic>
+      <p:pic>
+        <p:nvPicPr>
+          <p:cNvPr id="12" name="图片 11"/>
+          <p:cNvPicPr>
+            <a:picLocks noChangeAspect="1"/>
+          </p:cNvPicPr>
+          <p:nvPr/>
+        </p:nvPicPr>
+        <p:blipFill>
+          <a:blip r:embed="rId9"/>
+          <a:stretch>
+            <a:fillRect/>
+          </a:stretch>
+        </p:blipFill>
+        <p:spPr>
+          <a:xfrm>
+            <a:off x="5529580" y="5756910"/>
+            <a:ext cx="962025" cy="342900"/>
+          </a:xfrm>
+          <a:prstGeom prst="rect">
+            <a:avLst/>
+          </a:prstGeom>
+        </p:spPr>
+      </p:pic>
+      <p:pic>
+        <p:nvPicPr>
+          <p:cNvPr id="13" name="图片 12"/>
+          <p:cNvPicPr>
+            <a:picLocks noChangeAspect="1"/>
+          </p:cNvPicPr>
+          <p:nvPr/>
+        </p:nvPicPr>
+        <p:blipFill>
+          <a:blip r:embed="rId10"/>
+          <a:stretch>
+            <a:fillRect/>
+          </a:stretch>
+        </p:blipFill>
+        <p:spPr>
+          <a:xfrm>
+            <a:off x="7549515" y="5696585"/>
+            <a:ext cx="1656080" cy="463550"/>
+          </a:xfrm>
+          <a:prstGeom prst="rect">
+            <a:avLst/>
+          </a:prstGeom>
+        </p:spPr>
+      </p:pic>
+    </p:spTree>
+  </p:cSld>
+  <p:clrMapOvr>
+    <a:masterClrMapping/>
+  </p:clrMapOvr>
+</p:sld>
+</file>
+
+<file path=ppt/slides/slide9.xml><?xml version="1.0" encoding="utf-8"?>
+<p:sld xmlns:a="http://schemas.openxmlformats.org/drawingml/2006/main" xmlns:r="http://schemas.openxmlformats.org/officeDocument/2006/relationships" xmlns:p="http://schemas.openxmlformats.org/presentationml/2006/main">
+  <p:cSld>
+    <p:spTree>
+      <p:nvGrpSpPr>
+        <p:cNvPr id="1" name=""/>
+        <p:cNvGrpSpPr/>
+        <p:nvPr/>
+      </p:nvGrpSpPr>
+      <p:grpSpPr/>
+      <p:sp>
+        <p:nvSpPr>
+          <p:cNvPr id="4" name="文本框 3"/>
+          <p:cNvSpPr txBox="1"/>
+          <p:nvPr/>
+        </p:nvSpPr>
+        <p:spPr>
+          <a:xfrm>
+            <a:off x="986790" y="943610"/>
+            <a:ext cx="10085070" cy="2306955"/>
+          </a:xfrm>
+          <a:prstGeom prst="rect">
+            <a:avLst/>
+          </a:prstGeom>
+          <a:noFill/>
+        </p:spPr>
+        <p:txBody>
+          <a:bodyPr wrap="square" rtlCol="0">
+            <a:spAutoFit/>
+          </a:bodyPr>
+          <a:p>
+            <a:r>
+              <a:rPr lang="zh-CN" altLang="en-US" sz="3600"/>
+              <a:t>主控</a:t>
+            </a:r>
+            <a:endParaRPr lang="zh-CN" altLang="en-US"/>
+          </a:p>
+          <a:p>
+            <a:r>
+              <a:rPr lang="en-US" altLang="zh-CN"/>
+              <a:t>	</a:t>
+            </a:r>
+            <a:r>
+              <a:rPr lang="zh-CN" altLang="en-US"/>
+              <a:t>主控负责硬盘所有数据的管理，相当于仓库的管理员，负责将对应的数据（货物）编号并放到合适的存储颗粒（货架）上。</a:t>
+            </a:r>
+            <a:endParaRPr lang="zh-CN" altLang="en-US"/>
+          </a:p>
+          <a:p>
+            <a:r>
+              <a:rPr lang="zh-CN" altLang="en-US"/>
+              <a:t>马牌（Marvell）</a:t>
+            </a:r>
+            <a:endParaRPr lang="zh-CN" altLang="en-US"/>
+          </a:p>
+          <a:p>
+            <a:r>
+              <a:rPr lang="zh-CN" altLang="en-US"/>
+              <a:t>三星</a:t>
+            </a:r>
+            <a:endParaRPr lang="zh-CN" altLang="en-US"/>
+          </a:p>
+          <a:p>
+            <a:r>
+              <a:rPr lang="zh-CN" altLang="en-US"/>
+              <a:t>英特尔</a:t>
+            </a:r>
+            <a:endParaRPr lang="zh-CN" altLang="en-US"/>
+          </a:p>
+          <a:p>
+            <a:r>
+              <a:rPr lang="zh-CN" altLang="en-US"/>
+              <a:t>还有做的不错的有东芝、慧荣、群联、闪迪（分型号）、联芸（国产）</a:t>
+            </a:r>
+            <a:endParaRPr lang="zh-CN" altLang="en-US"/>
+          </a:p>
+        </p:txBody>
+      </p:sp>
+      <p:pic>
+        <p:nvPicPr>
+          <p:cNvPr id="2" name="图片 1"/>
+          <p:cNvPicPr>
+            <a:picLocks noChangeAspect="1"/>
+          </p:cNvPicPr>
+          <p:nvPr>
+            <p:custDataLst>
+              <p:tags r:id="rId1"/>
+            </p:custDataLst>
+          </p:nvPr>
+        </p:nvPicPr>
+        <p:blipFill>
+          <a:blip r:embed="rId2"/>
+          <a:stretch>
+            <a:fillRect/>
+          </a:stretch>
+        </p:blipFill>
+        <p:spPr>
+          <a:xfrm>
+            <a:off x="391795" y="4653280"/>
+            <a:ext cx="1731645" cy="904240"/>
+          </a:xfrm>
+          <a:prstGeom prst="rect">
+            <a:avLst/>
+          </a:prstGeom>
+        </p:spPr>
+      </p:pic>
+      <p:pic>
+        <p:nvPicPr>
+          <p:cNvPr id="5" name="图片 4"/>
+          <p:cNvPicPr>
+            <a:picLocks noChangeAspect="1"/>
+          </p:cNvPicPr>
+          <p:nvPr/>
+        </p:nvPicPr>
+        <p:blipFill>
+          <a:blip r:embed="rId3"/>
+          <a:stretch>
+            <a:fillRect/>
+          </a:stretch>
+        </p:blipFill>
+        <p:spPr>
+          <a:xfrm>
+            <a:off x="2740660" y="4576445"/>
+            <a:ext cx="2552700" cy="942975"/>
+          </a:xfrm>
+          <a:prstGeom prst="rect">
+            <a:avLst/>
+          </a:prstGeom>
+        </p:spPr>
+      </p:pic>
+      <p:pic>
+        <p:nvPicPr>
+          <p:cNvPr id="6" name="图片 5"/>
+          <p:cNvPicPr>
+            <a:picLocks noChangeAspect="1"/>
+          </p:cNvPicPr>
+          <p:nvPr/>
+        </p:nvPicPr>
+        <p:blipFill>
+          <a:blip r:embed="rId4"/>
+          <a:stretch>
+            <a:fillRect/>
+          </a:stretch>
+        </p:blipFill>
+        <p:spPr>
+          <a:xfrm>
+            <a:off x="5948045" y="4617720"/>
+            <a:ext cx="2819400" cy="647700"/>
+          </a:xfrm>
+          <a:prstGeom prst="rect">
+            <a:avLst/>
+          </a:prstGeom>
+        </p:spPr>
+      </p:pic>
+      <p:pic>
+        <p:nvPicPr>
+          <p:cNvPr id="7" name="图片 6"/>
+          <p:cNvPicPr>
+            <a:picLocks noChangeAspect="1"/>
+          </p:cNvPicPr>
+          <p:nvPr/>
+        </p:nvPicPr>
+        <p:blipFill>
+          <a:blip r:embed="rId5"/>
+          <a:stretch>
+            <a:fillRect/>
+          </a:stretch>
+        </p:blipFill>
+        <p:spPr>
+          <a:xfrm>
+            <a:off x="9464675" y="4493895"/>
+            <a:ext cx="962025" cy="895350"/>
+          </a:xfrm>
+          <a:prstGeom prst="rect">
+            <a:avLst/>
+          </a:prstGeom>
+        </p:spPr>
+      </p:pic>
+    </p:spTree>
+  </p:cSld>
+  <p:clrMapOvr>
+    <a:masterClrMapping/>
+  </p:clrMapOvr>
+</p:sld>
+</file>
+
+<file path=ppt/tags/tag1.xml><?xml version="1.0" encoding="utf-8"?>
+<p:tagLst xmlns:p="http://schemas.openxmlformats.org/presentationml/2006/main">
+  <p:tag name="KSO_WM_UNIT_PLACING_PICTURE_USER_VIEWPORT" val="{&quot;height&quot;:2115,&quot;width&quot;:4050}"/>
+</p:tagLst>
 </file>
 
 <file path=ppt/theme/theme1.xml><?xml version="1.0" encoding="utf-8"?>

--- a/src/ppt/ssd/SSD固态硬盘.pptx
+++ b/src/ppt/ssd/SSD固态硬盘.pptx
@@ -3290,7 +3290,7 @@
         <p:spPr>
           <a:xfrm>
             <a:off x="1082040" y="390525"/>
-            <a:ext cx="8658225" cy="1476375"/>
+            <a:ext cx="8658225" cy="2030095"/>
           </a:xfrm>
           <a:prstGeom prst="rect">
             <a:avLst/>
@@ -3301,6 +3301,20 @@
           <a:bodyPr wrap="square" rtlCol="0">
             <a:spAutoFit/>
           </a:bodyPr>
+          <a:p>
+            <a:r>
+              <a:rPr lang="zh-CN" altLang="en-US"/>
+              <a:t>如何选购？</a:t>
+            </a:r>
+            <a:endParaRPr lang="zh-CN" altLang="en-US"/>
+          </a:p>
+          <a:p>
+            <a:r>
+              <a:rPr lang="zh-CN" altLang="en-US"/>
+              <a:t>品牌，容量，考虑散热（三星的一般比较热）</a:t>
+            </a:r>
+            <a:endParaRPr lang="zh-CN" altLang="en-US"/>
+          </a:p>
           <a:p>
             <a:r>
               <a:rPr lang="zh-CN" altLang="en-US"/>

--- a/src/ppt/ssd/SSD固态硬盘.pptx
+++ b/src/ppt/ssd/SSD固态硬盘.pptx
@@ -5,7 +5,7 @@
     <p:sldMasterId id="2147483648" r:id="rId1"/>
   </p:sldMasterIdLst>
   <p:notesMasterIdLst>
-    <p:notesMasterId r:id="rId13"/>
+    <p:notesMasterId r:id="rId14"/>
   </p:notesMasterIdLst>
   <p:sldIdLst>
     <p:sldId id="256" r:id="rId3"/>
@@ -18,6 +18,7 @@
     <p:sldId id="262" r:id="rId10"/>
     <p:sldId id="263" r:id="rId11"/>
     <p:sldId id="266" r:id="rId12"/>
+    <p:sldId id="274" r:id="rId13"/>
   </p:sldIdLst>
   <p:sldSz cx="12192000" cy="6858000"/>
   <p:notesSz cx="7103745" cy="10234295"/>
@@ -3516,6 +3517,162 @@
           <a:xfrm>
             <a:off x="3716020" y="4676140"/>
             <a:ext cx="4343400" cy="1543050"/>
+          </a:xfrm>
+          <a:prstGeom prst="rect">
+            <a:avLst/>
+          </a:prstGeom>
+        </p:spPr>
+      </p:pic>
+    </p:spTree>
+  </p:cSld>
+  <p:clrMapOvr>
+    <a:masterClrMapping/>
+  </p:clrMapOvr>
+</p:sld>
+</file>
+
+<file path=ppt/slides/slide11.xml><?xml version="1.0" encoding="utf-8"?>
+<p:sld xmlns:a="http://schemas.openxmlformats.org/drawingml/2006/main" xmlns:r="http://schemas.openxmlformats.org/officeDocument/2006/relationships" xmlns:p="http://schemas.openxmlformats.org/presentationml/2006/main">
+  <p:cSld>
+    <p:spTree>
+      <p:nvGrpSpPr>
+        <p:cNvPr id="1" name=""/>
+        <p:cNvGrpSpPr/>
+        <p:nvPr/>
+      </p:nvGrpSpPr>
+      <p:grpSpPr/>
+      <p:sp>
+        <p:nvSpPr>
+          <p:cNvPr id="2" name="文本框 1"/>
+          <p:cNvSpPr txBox="1"/>
+          <p:nvPr/>
+        </p:nvSpPr>
+        <p:spPr>
+          <a:xfrm>
+            <a:off x="991870" y="521335"/>
+            <a:ext cx="8107680" cy="1291590"/>
+          </a:xfrm>
+          <a:prstGeom prst="rect">
+            <a:avLst/>
+          </a:prstGeom>
+          <a:noFill/>
+        </p:spPr>
+        <p:txBody>
+          <a:bodyPr wrap="none" rtlCol="0">
+            <a:spAutoFit/>
+          </a:bodyPr>
+          <a:p>
+            <a:pPr algn="l"/>
+            <a:r>
+              <a:rPr lang="en-US" altLang="zh-CN"/>
+              <a:t>P.S </a:t>
+            </a:r>
+            <a:r>
+              <a:rPr lang="zh-CN" altLang="en-US"/>
+              <a:t>如果要购买机械硬盘。</a:t>
+            </a:r>
+            <a:endParaRPr lang="zh-CN" altLang="en-US"/>
+          </a:p>
+          <a:p>
+            <a:pPr algn="l"/>
+            <a:r>
+              <a:rPr lang="zh-CN" altLang="en-US" sz="1200"/>
+              <a:t>购买传统垂直（</a:t>
+            </a:r>
+            <a:r>
+              <a:rPr lang="en-US" altLang="zh-CN" sz="1200"/>
+              <a:t>CMR</a:t>
+            </a:r>
+            <a:r>
+              <a:rPr lang="zh-CN" altLang="en-US" sz="1200"/>
+              <a:t>）而不是叠瓦（</a:t>
+            </a:r>
+            <a:r>
+              <a:rPr lang="en-US" altLang="zh-CN" sz="1200"/>
+              <a:t>SMR</a:t>
+            </a:r>
+            <a:r>
+              <a:rPr lang="zh-CN" altLang="en-US" sz="1200"/>
+              <a:t>）。</a:t>
+            </a:r>
+            <a:endParaRPr lang="zh-CN" altLang="en-US" sz="1200"/>
+          </a:p>
+          <a:p>
+            <a:pPr algn="l"/>
+            <a:r>
+              <a:rPr lang="en-US" altLang="zh-CN" sz="1200"/>
+              <a:t>叠瓦盘，又叫做SMR(Shingled Magneting Recording)，“叠瓦式磁记录”。</a:t>
+            </a:r>
+            <a:endParaRPr lang="en-US" altLang="zh-CN" sz="1200"/>
+          </a:p>
+          <a:p>
+            <a:pPr algn="l"/>
+            <a:r>
+              <a:rPr lang="en-US" altLang="zh-CN" sz="1200"/>
+              <a:t>顾名思义，SMR方式的写入磁道是重叠的，一片一片叠起来就像瓦片一样。</a:t>
+            </a:r>
+            <a:endParaRPr lang="en-US" altLang="zh-CN" sz="1200"/>
+          </a:p>
+          <a:p>
+            <a:pPr algn="l"/>
+            <a:r>
+              <a:rPr lang="zh-CN" altLang="en-US" sz="1200"/>
+              <a:t>特点缓存大，成本低，存储容量高。</a:t>
+            </a:r>
+            <a:endParaRPr lang="zh-CN" altLang="en-US" sz="1200"/>
+          </a:p>
+          <a:p>
+            <a:pPr algn="l"/>
+            <a:r>
+              <a:rPr lang="zh-CN" altLang="en-US" sz="1200"/>
+              <a:t>体现在产品上就是同样的存储容量，价格更便宜。但是缺点有很多：随机写入速度慢很多，磁盘寿命低，容易丢数据。</a:t>
+            </a:r>
+            <a:endParaRPr lang="zh-CN" altLang="en-US" sz="1200"/>
+          </a:p>
+        </p:txBody>
+      </p:sp>
+      <p:pic>
+        <p:nvPicPr>
+          <p:cNvPr id="3" name="图片 2"/>
+          <p:cNvPicPr>
+            <a:picLocks noChangeAspect="1"/>
+          </p:cNvPicPr>
+          <p:nvPr/>
+        </p:nvPicPr>
+        <p:blipFill>
+          <a:blip r:embed="rId1"/>
+          <a:stretch>
+            <a:fillRect/>
+          </a:stretch>
+        </p:blipFill>
+        <p:spPr>
+          <a:xfrm>
+            <a:off x="481965" y="3971290"/>
+            <a:ext cx="4112895" cy="1323340"/>
+          </a:xfrm>
+          <a:prstGeom prst="rect">
+            <a:avLst/>
+          </a:prstGeom>
+        </p:spPr>
+      </p:pic>
+      <p:pic>
+        <p:nvPicPr>
+          <p:cNvPr id="4" name="图片 3"/>
+          <p:cNvPicPr>
+            <a:picLocks noChangeAspect="1"/>
+          </p:cNvPicPr>
+          <p:nvPr/>
+        </p:nvPicPr>
+        <p:blipFill>
+          <a:blip r:embed="rId2"/>
+          <a:stretch>
+            <a:fillRect/>
+          </a:stretch>
+        </p:blipFill>
+        <p:spPr>
+          <a:xfrm>
+            <a:off x="578485" y="1997710"/>
+            <a:ext cx="3446780" cy="1664335"/>
           </a:xfrm>
           <a:prstGeom prst="rect">
             <a:avLst/>

--- a/src/ppt/ssd/SSD固态硬盘.pptx
+++ b/src/ppt/ssd/SSD固态硬盘.pptx
@@ -5,7 +5,7 @@
     <p:sldMasterId id="2147483648" r:id="rId1"/>
   </p:sldMasterIdLst>
   <p:notesMasterIdLst>
-    <p:notesMasterId r:id="rId14"/>
+    <p:notesMasterId r:id="rId15"/>
   </p:notesMasterIdLst>
   <p:sldIdLst>
     <p:sldId id="256" r:id="rId3"/>
@@ -17,8 +17,9 @@
     <p:sldId id="261" r:id="rId9"/>
     <p:sldId id="262" r:id="rId10"/>
     <p:sldId id="263" r:id="rId11"/>
-    <p:sldId id="266" r:id="rId12"/>
-    <p:sldId id="274" r:id="rId13"/>
+    <p:sldId id="275" r:id="rId12"/>
+    <p:sldId id="266" r:id="rId13"/>
+    <p:sldId id="274" r:id="rId14"/>
   </p:sldIdLst>
   <p:sldSz cx="12192000" cy="6858000"/>
   <p:notesSz cx="7103745" cy="10234295"/>
@@ -3282,6 +3283,80 @@
         <p:nvPr/>
       </p:nvGrpSpPr>
       <p:grpSpPr/>
+      <p:pic>
+        <p:nvPicPr>
+          <p:cNvPr id="2" name="图片 1" descr="%P%L)UDXR{)IMOE]7]V81YI"/>
+          <p:cNvPicPr>
+            <a:picLocks noChangeAspect="1"/>
+          </p:cNvPicPr>
+          <p:nvPr>
+            <p:custDataLst>
+              <p:tags r:id="rId1"/>
+            </p:custDataLst>
+          </p:nvPr>
+        </p:nvPicPr>
+        <p:blipFill>
+          <a:blip r:embed="rId2"/>
+          <a:stretch>
+            <a:fillRect/>
+          </a:stretch>
+        </p:blipFill>
+        <p:spPr>
+          <a:xfrm>
+            <a:off x="715010" y="548005"/>
+            <a:ext cx="4434840" cy="4046220"/>
+          </a:xfrm>
+          <a:prstGeom prst="rect">
+            <a:avLst/>
+          </a:prstGeom>
+        </p:spPr>
+      </p:pic>
+      <p:pic>
+        <p:nvPicPr>
+          <p:cNvPr id="3" name="图片 2" descr="20210109093042"/>
+          <p:cNvPicPr>
+            <a:picLocks noChangeAspect="1"/>
+          </p:cNvPicPr>
+          <p:nvPr>
+            <p:custDataLst>
+              <p:tags r:id="rId3"/>
+            </p:custDataLst>
+          </p:nvPr>
+        </p:nvPicPr>
+        <p:blipFill>
+          <a:blip r:embed="rId4"/>
+          <a:stretch>
+            <a:fillRect/>
+          </a:stretch>
+        </p:blipFill>
+        <p:spPr>
+          <a:xfrm>
+            <a:off x="5638165" y="673100"/>
+            <a:ext cx="5629910" cy="3921125"/>
+          </a:xfrm>
+          <a:prstGeom prst="rect">
+            <a:avLst/>
+          </a:prstGeom>
+        </p:spPr>
+      </p:pic>
+    </p:spTree>
+  </p:cSld>
+  <p:clrMapOvr>
+    <a:masterClrMapping/>
+  </p:clrMapOvr>
+</p:sld>
+</file>
+
+<file path=ppt/slides/slide11.xml><?xml version="1.0" encoding="utf-8"?>
+<p:sld xmlns:a="http://schemas.openxmlformats.org/drawingml/2006/main" xmlns:r="http://schemas.openxmlformats.org/officeDocument/2006/relationships" xmlns:p="http://schemas.openxmlformats.org/presentationml/2006/main">
+  <p:cSld>
+    <p:spTree>
+      <p:nvGrpSpPr>
+        <p:cNvPr id="1" name=""/>
+        <p:cNvGrpSpPr/>
+        <p:nvPr/>
+      </p:nvGrpSpPr>
+      <p:grpSpPr/>
       <p:sp>
         <p:nvSpPr>
           <p:cNvPr id="2" name="文本框 1"/>
@@ -3531,7 +3606,7 @@
 </p:sld>
 </file>
 
-<file path=ppt/slides/slide11.xml><?xml version="1.0" encoding="utf-8"?>
+<file path=ppt/slides/slide12.xml><?xml version="1.0" encoding="utf-8"?>
 <p:sld xmlns:a="http://schemas.openxmlformats.org/drawingml/2006/main" xmlns:r="http://schemas.openxmlformats.org/officeDocument/2006/relationships" xmlns:p="http://schemas.openxmlformats.org/presentationml/2006/main">
   <p:cSld>
     <p:spTree>
@@ -5156,6 +5231,18 @@
 <file path=ppt/tags/tag1.xml><?xml version="1.0" encoding="utf-8"?>
 <p:tagLst xmlns:p="http://schemas.openxmlformats.org/presentationml/2006/main">
   <p:tag name="KSO_WM_UNIT_PLACING_PICTURE_USER_VIEWPORT" val="{&quot;height&quot;:2115,&quot;width&quot;:4050}"/>
+</p:tagLst>
+</file>
+
+<file path=ppt/tags/tag2.xml><?xml version="1.0" encoding="utf-8"?>
+<p:tagLst xmlns:p="http://schemas.openxmlformats.org/presentationml/2006/main">
+  <p:tag name="KSO_WM_UNIT_PLACING_PICTURE_USER_VIEWPORT" val="{&quot;height&quot;:6870,&quot;width&quot;:7530}"/>
+</p:tagLst>
+</file>
+
+<file path=ppt/tags/tag3.xml><?xml version="1.0" encoding="utf-8"?>
+<p:tagLst xmlns:p="http://schemas.openxmlformats.org/presentationml/2006/main">
+  <p:tag name="KSO_WM_UNIT_PLACING_PICTURE_USER_VIEWPORT" val="{&quot;height&quot;:9360,&quot;width&quot;:13440}"/>
 </p:tagLst>
 </file>
 
